--- a/08-Kubernetes/session3/08-03-AWS-EKS-Managed-Kubernetes.pptx
+++ b/08-Kubernetes/session3/08-03-AWS-EKS-Managed-Kubernetes.pptx
@@ -1748,9 +1748,6 @@
           <a:bodyPr wrap="square" lIns="0" tIns="0" rIns="0" bIns="0" rtlCol="0" anchor="ctr"/>
           <a:lstStyle/>
           <a:p>
-            <a:pPr marL="0" indent="0">
-              <a:buNone/>
-            </a:pPr>
             <a:r>
               <a:rPr lang="en-US" sz="3600" b="1" dirty="0">
                 <a:solidFill>
@@ -1760,48 +1757,20 @@
                 <a:ea typeface="Arial" pitchFamily="34" charset="-122"/>
                 <a:cs typeface="Arial" pitchFamily="34" charset="-120"/>
               </a:rPr>
-              <a:t>EKS vs Self-Managed Kubernetes</a:t>
+              <a:t>EKS </a:t>
+            </a:r>
+            <a:r>
+              <a:rPr lang="en-US" sz="3600" i="1" dirty="0">
+                <a:solidFill>
+                  <a:srgbClr val="7A8BBE"/>
+                </a:solidFill>
+                <a:latin typeface="Arial" pitchFamily="34" charset="0"/>
+                <a:ea typeface="Arial" pitchFamily="34" charset="-122"/>
+                <a:cs typeface="Arial" pitchFamily="34" charset="-120"/>
+              </a:rPr>
+              <a:t>Responsibility Matrix</a:t>
             </a:r>
             <a:endParaRPr lang="en-US" sz="3600" dirty="0"/>
-          </a:p>
-        </p:txBody>
-      </p:sp>
-      <p:sp>
-        <p:nvSpPr>
-          <p:cNvPr id="3" name="Text 1"/>
-          <p:cNvSpPr/>
-          <p:nvPr/>
-        </p:nvSpPr>
-        <p:spPr>
-          <a:xfrm>
-            <a:off x="457200" y="868680"/>
-            <a:ext cx="8229600" cy="365760"/>
-          </a:xfrm>
-          <a:prstGeom prst="rect">
-            <a:avLst/>
-          </a:prstGeom>
-          <a:noFill/>
-          <a:ln/>
-        </p:spPr>
-        <p:txBody>
-          <a:bodyPr wrap="square" rtlCol="0" anchor="ctr"/>
-          <a:lstStyle/>
-          <a:p>
-            <a:pPr marL="0" indent="0">
-              <a:buNone/>
-            </a:pPr>
-            <a:r>
-              <a:rPr lang="en-US" sz="1400" i="1" dirty="0">
-                <a:solidFill>
-                  <a:srgbClr val="7A8BBE"/>
-                </a:solidFill>
-                <a:latin typeface="Arial" pitchFamily="34" charset="0"/>
-                <a:ea typeface="Arial" pitchFamily="34" charset="-122"/>
-                <a:cs typeface="Arial" pitchFamily="34" charset="-120"/>
-              </a:rPr>
-              <a:t>Responsibility Matrix</a:t>
-            </a:r>
-            <a:endParaRPr lang="en-US" sz="1400" dirty="0"/>
           </a:p>
         </p:txBody>
       </p:sp>
